--- a/training/decks/t2-debrief.pptx
+++ b/training/decks/t2-debrief.pptx
@@ -508,7 +508,7 @@
           </a:p>
           <a:p>
             <a:r>
-              <a:t>rehearsal again: press Reset training in Plan, open Training 2 for live and start from the top.</a:t>
+              <a:t>rehearsal again: press Reset training in Plan, open Training Session 2 for live and start from the top.</a:t>
             </a:r>
           </a:p>
           <a:p>
@@ -583,7 +583,7 @@
           <a:lstStyle/>
           <a:p>
             <a:r>
-              <a:t>Trainer: That is the end of operator training. Training 3 (Planner) and 4 (Setup and the</a:t>
+              <a:t>Trainer: That is the end of operator training. Training Session 3 (Planner) and Training Session 4 (Setup and the</a:t>
             </a:r>
           </a:p>
           <a:p>
@@ -3991,7 +3991,7 @@
                 </a:solidFill>
                 <a:latin typeface="Noto Sans"/>
               </a:rPr>
-              <a:t>Training 2</a:t>
+              <a:t>Training Session 2</a:t>
             </a:r>
           </a:p>
         </p:txBody>
@@ -4069,7 +4069,7 @@
                 </a:solidFill>
                 <a:latin typeface="Noto Sans"/>
               </a:rPr>
-              <a:t>Next for planners: Training 3. For media volunteers: Training 4.</a:t>
+              <a:t>Next for planners: Training Session 3. For media volunteers: Training Session 4.</a:t>
             </a:r>
           </a:p>
         </p:txBody>

--- a/training/decks/t2-debrief.pptx
+++ b/training/decks/t2-debrief.pptx
@@ -588,7 +588,7 @@
           </a:p>
           <a:p>
             <a:r>
-              <a:t>stream) come in a later version of Lampstand. Close the service with Close service, top right.</a:t>
+              <a:t>stream) come in a later version of Lampstand. Close the service with Close service, bottom right.</a:t>
             </a:r>
           </a:p>
         </p:txBody>
